--- a/docs/deck/Prama-Evidence-First-Data-Quality.pptx
+++ b/docs/deck/Prama-Evidence-First-Data-Quality.pptx
@@ -18192,7 +18192,7 @@
                 </a:solidFill>
                 <a:latin typeface="Calibri"/>
               </a:rPr>
-              <a:t>What column lineage cannot see</a:t>
+              <a:t>A join decides which rows exist</a:t>
             </a:r>
           </a:p>
         </p:txBody>
@@ -19666,7 +19666,7 @@
                 </a:solidFill>
                 <a:latin typeface="Calibri"/>
               </a:rPr>
-              <a:t>Case study 8: two SQL scripts and a Power BI model give 12 parsed column edges; the defect is traced from the raw feed to the measure a risk committee reads.</a:t>
+              <a:t>Case study 8: two SQL scripts and a Power BI model give 14 parsed column edges; the defect is traced from the raw feed to the measure a risk committee reads.</a:t>
             </a:r>
           </a:p>
         </p:txBody>
@@ -20364,7 +20364,7 @@
                 </a:solidFill>
                 <a:latin typeface="Calibri"/>
               </a:rPr>
-              <a:t>Case study 8 found both defects this slide depends on: a proposed RECONCILE with no tolerance could not run, and a filtered copy reported 118 cancelled trades as breaks. Both are fixed, each with a test that fails on the old code.</a:t>
+              <a:t>Case study 8 found the defects this slide depends on: a RECONCILE with no tolerance, a filtered copy reported as 118 breaks, and a join lineage could not see. All are fixed, each with a test that fails on the old code.</a:t>
             </a:r>
           </a:p>
         </p:txBody>
@@ -20379,7 +20379,7 @@
         </p:nvGraphicFramePr>
         <p:xfrm>
           <a:off x="777240" y="1386967"/>
-          <a:ext cx="10637214" cy="1772347"/>
+          <a:ext cx="10637214" cy="2155188"/>
         </p:xfrm>
         <a:graphic>
           <a:graphicData uri="http://schemas.openxmlformats.org/drawingml/2006/table">
@@ -20631,7 +20631,7 @@
                           </a:solidFill>
                           <a:latin typeface="Calibri"/>
                         </a:rPr>
-                        <a:t>The copy agrees with its source, exactly (WITHIN 0)</a:t>
+                        <a:t>The copy agrees with the same rows of its source, exactly (WITHIN 0)</a:t>
                       </a:r>
                     </a:p>
                   </a:txBody>
@@ -20653,13 +20653,81 @@
                           </a:solidFill>
                           <a:latin typeface="Calibri"/>
                         </a:rPr>
-                        <a:t>Inferred, or the copy is filtered</a:t>
+                        <a:t>Inferred, or its filter cannot be carried over</a:t>
                       </a:r>
                     </a:p>
                   </a:txBody>
                   <a:tcPr marL="82296" marR="64008" marT="32004" marB="32004" anchor="ctr">
                     <a:solidFill>
                       <a:srgbClr val="FFFFFF"/>
+                    </a:solidFill>
+                  </a:tcPr>
+                </a:tc>
+              </a:tr>
+              <a:tr h="382841">
+                <a:tc>
+                  <a:txBody>
+                    <a:bodyPr wrap="square"/>
+                    <a:lstStyle/>
+                    <a:p>
+                      <a:r>
+                        <a:rPr sz="1700" b="1">
+                          <a:solidFill>
+                            <a:srgbClr val="0E1A46"/>
+                          </a:solidFill>
+                          <a:latin typeface="Calibri"/>
+                        </a:rPr>
+                        <a:t>Join</a:t>
+                      </a:r>
+                    </a:p>
+                  </a:txBody>
+                  <a:tcPr marL="82296" marR="64008" marT="32004" marB="32004" anchor="ctr">
+                    <a:solidFill>
+                      <a:srgbClr val="F3F5FA"/>
+                    </a:solidFill>
+                  </a:tcPr>
+                </a:tc>
+                <a:tc>
+                  <a:txBody>
+                    <a:bodyPr wrap="square"/>
+                    <a:lstStyle/>
+                    <a:p>
+                      <a:r>
+                        <a:rPr sz="1700" b="0">
+                          <a:solidFill>
+                            <a:srgbClr val="14182E"/>
+                          </a:solidFill>
+                          <a:latin typeface="Calibri"/>
+                        </a:rPr>
+                        <a:t>Every driving row's key finds its match</a:t>
+                      </a:r>
+                    </a:p>
+                  </a:txBody>
+                  <a:tcPr marL="82296" marR="64008" marT="32004" marB="32004" anchor="ctr">
+                    <a:solidFill>
+                      <a:srgbClr val="F3F5FA"/>
+                    </a:solidFill>
+                  </a:tcPr>
+                </a:tc>
+                <a:tc>
+                  <a:txBody>
+                    <a:bodyPr wrap="square"/>
+                    <a:lstStyle/>
+                    <a:p>
+                      <a:r>
+                        <a:rPr sz="1700" b="0">
+                          <a:solidFill>
+                            <a:srgbClr val="14182E"/>
+                          </a:solidFill>
+                          <a:latin typeface="Calibri"/>
+                        </a:rPr>
+                        <a:t>The edge is inferred</a:t>
+                      </a:r>
+                    </a:p>
+                  </a:txBody>
+                  <a:tcPr marL="82296" marR="64008" marT="32004" marB="32004" anchor="ctr">
+                    <a:solidFill>
+                      <a:srgbClr val="F3F5FA"/>
                     </a:solidFill>
                   </a:tcPr>
                 </a:tc>
@@ -20814,7 +20882,7 @@
                 </a:solidFill>
                 <a:latin typeface="Calibri"/>
               </a:rPr>
-              <a:t>AN HONEST LIMIT</a:t>
+              <a:t>POPULATION, NOT VALUE</a:t>
             </a:r>
           </a:p>
         </p:txBody>
@@ -20859,7 +20927,7 @@
                 </a:solidFill>
                 <a:latin typeface="Georgia"/>
               </a:rPr>
-              <a:t>What column lineage cannot see</a:t>
+              <a:t>A join decides which rows exist</a:t>
             </a:r>
           </a:p>
         </p:txBody>
@@ -21126,7 +21194,7 @@
                 </a:solidFill>
                 <a:latin typeface="Calibri"/>
               </a:rPr>
-              <a:t>Lineage carries a control downstream; it does not replace the control at the source. That is the design, and case study 8 is its evidence.</a:t>
+              <a:t>The first version of case study 8 showed the blast radius stopping at staging. That negative result is in the paper, with the repair.</a:t>
             </a:r>
           </a:p>
         </p:txBody>
@@ -21313,7 +21381,7 @@
                 </a:solidFill>
                 <a:latin typeface="Calibri"/>
               </a:rPr>
-              <a:t>Four trades with currency 'usd' in lower case</a:t>
+              <a:t>Four trades with currency 'usd' in lower case; three are staged</a:t>
             </a:r>
           </a:p>
           <a:p>
@@ -21344,7 +21412,7 @@
                 </a:solidFill>
                 <a:latin typeface="Calibri"/>
               </a:rPr>
-              <a:t>Three are staged; the mart joins FX rates on currency</a:t>
+              <a:t>The mart inner-joins FX rates on currency, and finds no rate</a:t>
             </a:r>
           </a:p>
           <a:p>
@@ -21375,7 +21443,38 @@
                 </a:solidFill>
                 <a:latin typeface="Calibri"/>
               </a:rPr>
-              <a:t>Those trades have no rate, and silently leave the mart</a:t>
+              <a:t>605,000,000 of notional leaves the mart: no error, no null</a:t>
+            </a:r>
+          </a:p>
+          <a:p>
+            <a:pPr>
+              <a:lnSpc>
+                <a:spcPct val="120000"/>
+              </a:lnSpc>
+              <a:spcBef>
+                <a:spcPts val="600"/>
+              </a:spcBef>
+              <a:spcAft>
+                <a:spcPts val="0"/>
+              </a:spcAft>
+            </a:pPr>
+            <a:r>
+              <a:rPr sz="1800" b="1">
+                <a:solidFill>
+                  <a:srgbClr val="2B3FA8"/>
+                </a:solidFill>
+                <a:latin typeface="Calibri"/>
+              </a:rPr>
+              <a:t>▪  </a:t>
+            </a:r>
+            <a:r>
+              <a:rPr sz="1800" b="0">
+                <a:solidFill>
+                  <a:srgbClr val="14182E"/>
+                </a:solidFill>
+                <a:latin typeface="Calibri"/>
+              </a:rPr>
+              <a:t>Value lineage cannot see it: the currency is never copied</a:t>
             </a:r>
           </a:p>
         </p:txBody>
@@ -21508,7 +21607,7 @@
                 </a:solidFill>
                 <a:latin typeface="Calibri"/>
               </a:rPr>
-              <a:t>What each part of Prama sees</a:t>
+              <a:t>What Prama does about it</a:t>
             </a:r>
           </a:p>
         </p:txBody>
@@ -21562,7 +21661,7 @@
                 </a:solidFill>
                 <a:latin typeface="Calibri"/>
               </a:rPr>
-              <a:t>The raw column's control: 4 of 2,000 rows</a:t>
+              <a:t>Join keys are edges into the view's rows, read through CTEs</a:t>
             </a:r>
           </a:p>
           <a:p>
@@ -21593,7 +21692,7 @@
                 </a:solidFill>
                 <a:latin typeface="Calibri"/>
               </a:rPr>
-              <a:t>The propagated control on staging: 3 of 1,882</a:t>
+              <a:t>The blast radius follows the rows to every column built on them</a:t>
             </a:r>
           </a:p>
           <a:p>
@@ -21624,7 +21723,7 @@
                 </a:solidFill>
                 <a:latin typeface="Calibri"/>
               </a:rPr>
-              <a:t>The blast radius: stops at staging, since a join key is not a value</a:t>
+              <a:t>The join proposes: every stg.trades.ccy exists in ref.fx_rates</a:t>
             </a:r>
           </a:p>
           <a:p>
@@ -21655,7 +21754,7 @@
                 </a:solidFill>
                 <a:latin typeface="Calibri"/>
               </a:rPr>
-              <a:t>The mart: no error, no null; 605,000,000 of notional simply gone</a:t>
+              <a:t>That check fails on 3 of 1,882, where the defect happens</a:t>
             </a:r>
           </a:p>
         </p:txBody>
@@ -36618,7 +36717,7 @@
                           </a:solidFill>
                           <a:latin typeface="Calibri"/>
                         </a:rPr>
-                        <a:t>12 edges; the defect traced to the dashboard</a:t>
+                        <a:t>Both defects traced; the FX join catches 3</a:t>
                       </a:r>
                     </a:p>
                   </a:txBody>

--- a/docs/deck/Prama-Evidence-First-Data-Quality.pptx
+++ b/docs/deck/Prama-Evidence-First-Data-Quality.pptx
@@ -8510,7 +8510,7 @@
         </p:nvGraphicFramePr>
         <p:xfrm>
           <a:off x="777240" y="1386967"/>
-          <a:ext cx="10637214" cy="3303711"/>
+          <a:ext cx="10637214" cy="3576825"/>
         </p:xfrm>
         <a:graphic>
           <a:graphicData uri="http://schemas.openxmlformats.org/drawingml/2006/table">
@@ -8706,7 +8706,7 @@
                   </a:tcPr>
                 </a:tc>
               </a:tr>
-              <a:tr h="382841">
+              <a:tr h="655955">
                 <a:tc>
                   <a:txBody>
                     <a:bodyPr wrap="square"/>
@@ -8741,7 +8741,7 @@
                           </a:solidFill>
                           <a:latin typeface="Calibri"/>
                         </a:rPr>
-                        <a:t>CHECK trades IS FRESH WITHIN 4 HOURS OF '06:30' CALENDAR 'TARGET2'</a:t>
+                        <a:t>CHECK trades.loaded_at IS FRESH WITHIN 4 HOURS OF '06:30' CALENDAR 'TARGET2'</a:t>
                       </a:r>
                     </a:p>
                   </a:txBody>
@@ -12032,7 +12032,7 @@
                 </a:solidFill>
                 <a:latin typeface="Calibri"/>
               </a:rPr>
-              <a:t>Run in a separate worker process, streamed in batches</a:t>
+              <a:t>Sandboxed: clean environment, audit hook, network namespace where allowed</a:t>
             </a:r>
           </a:p>
           <a:p>
@@ -15131,7 +15131,7 @@
                 </a:solidFill>
                 <a:latin typeface="Georgia"/>
               </a:rPr>
-              <a:t>Sealed bundle</a:t>
+              <a:t>Anchored</a:t>
             </a:r>
           </a:p>
         </p:txBody>
@@ -15176,7 +15176,7 @@
                 </a:solidFill>
                 <a:latin typeface="Calibri"/>
               </a:rPr>
-              <a:t>Manifest and SBOM, HMAC-sealed; optionally Ed25519-signed.</a:t>
+              <a:t>After each run, the head is time-stamped by an RFC 3161 authority.</a:t>
             </a:r>
           </a:p>
         </p:txBody>
@@ -15511,7 +15511,7 @@
                 </a:solidFill>
                 <a:latin typeface="Calibri"/>
               </a:rPr>
-              <a:t>prama bundle verify exits 3 when a bundle must not be installed: a failure an automated pipeline cannot mistake for success.</a:t>
+              <a:t>A chain rebuilt by whoever holds the key verifies on its own, and fails against its anchor: the signature is checked with openssl ts -verify.</a:t>
             </a:r>
           </a:p>
           <a:p>
@@ -15542,7 +15542,7 @@
                 </a:solidFill>
                 <a:latin typeface="Calibri"/>
               </a:rPr>
-              <a:t>Every case study ends by printing its evidence chain as verified, with the Merkle root.</a:t>
+              <a:t>Exported bundles are HMAC-sealed, optionally Ed25519-signed; prama bundle verify exits 3 when one must not be installed.</a:t>
             </a:r>
           </a:p>
         </p:txBody>

--- a/docs/deck/Prama-Evidence-First-Data-Quality.pptx
+++ b/docs/deck/Prama-Evidence-First-Data-Quality.pptx
@@ -35581,7 +35581,7 @@
                 </a:solidFill>
                 <a:latin typeface="Calibri"/>
               </a:rPr>
-              <a:t>Bounds and ablations, not a league table</a:t>
+              <a:t>Bounds, ablations, and Prama itself</a:t>
             </a:r>
           </a:p>
           <a:p>
@@ -36923,7 +36923,7 @@
                 </a:solidFill>
                 <a:latin typeface="Georgia"/>
               </a:rPr>
-              <a:t>Bounds and ablations, not a league table</a:t>
+              <a:t>Bounds, ablations, and Prama itself</a:t>
             </a:r>
           </a:p>
         </p:txBody>
@@ -37590,7 +37590,7 @@
                 </a:solidFill>
                 <a:latin typeface="Georgia"/>
               </a:rPr>
-              <a:t>0.39</a:t>
+              <a:t>0.49</a:t>
             </a:r>
           </a:p>
         </p:txBody>
@@ -37629,13 +37629,13 @@
               </a:spcAft>
             </a:pPr>
             <a:r>
-              <a:rPr sz="1050" b="0" i="0">
+              <a:rPr sz="950" b="0" i="0">
                 <a:solidFill>
                   <a:srgbClr val="5A6480"/>
                 </a:solidFill>
                 <a:latin typeface="Calibri"/>
               </a:rPr>
-              <a:t>F1 of the best single-technique ablation</a:t>
+              <a:t>F1 of Prama's declared path; 0.39 for the best single technique</a:t>
             </a:r>
           </a:p>
         </p:txBody>
@@ -37917,7 +37917,7 @@
         </p:nvGraphicFramePr>
         <p:xfrm>
           <a:off x="777240" y="2740279"/>
-          <a:ext cx="10637212" cy="1817814"/>
+          <a:ext cx="10637212" cy="2441638"/>
         </p:xfrm>
         <a:graphic>
           <a:graphicData uri="http://schemas.openxmlformats.org/drawingml/2006/table">
@@ -38488,6 +38488,118 @@
                   <a:tcPr marL="82296" marR="64008" marT="32004" marB="32004" anchor="ctr">
                     <a:solidFill>
                       <a:srgbClr val="F3F5FA"/>
+                    </a:solidFill>
+                  </a:tcPr>
+                </a:tc>
+              </a:tr>
+              <a:tr h="623824">
+                <a:tc>
+                  <a:txBody>
+                    <a:bodyPr wrap="square"/>
+                    <a:lstStyle/>
+                    <a:p>
+                      <a:r>
+                        <a:rPr sz="1600" b="1">
+                          <a:solidFill>
+                            <a:srgbClr val="0E1A46"/>
+                          </a:solidFill>
+                          <a:latin typeface="Calibri"/>
+                        </a:rPr>
+                        <a:t>prama-declared (system)</a:t>
+                      </a:r>
+                    </a:p>
+                  </a:txBody>
+                  <a:tcPr marL="82296" marR="64008" marT="32004" marB="32004" anchor="ctr">
+                    <a:solidFill>
+                      <a:srgbClr val="FFFFFF"/>
+                    </a:solidFill>
+                  </a:tcPr>
+                </a:tc>
+                <a:tc>
+                  <a:txBody>
+                    <a:bodyPr wrap="square"/>
+                    <a:lstStyle/>
+                    <a:p>
+                      <a:r>
+                        <a:rPr sz="1600" b="0">
+                          <a:solidFill>
+                            <a:srgbClr val="14182E"/>
+                          </a:solidFill>
+                          <a:latin typeface="Calibri"/>
+                        </a:rPr>
+                        <a:t>10/28</a:t>
+                      </a:r>
+                    </a:p>
+                  </a:txBody>
+                  <a:tcPr marL="82296" marR="64008" marT="32004" marB="32004" anchor="ctr">
+                    <a:solidFill>
+                      <a:srgbClr val="FFFFFF"/>
+                    </a:solidFill>
+                  </a:tcPr>
+                </a:tc>
+                <a:tc>
+                  <a:txBody>
+                    <a:bodyPr wrap="square"/>
+                    <a:lstStyle/>
+                    <a:p>
+                      <a:r>
+                        <a:rPr sz="1600" b="0">
+                          <a:solidFill>
+                            <a:srgbClr val="14182E"/>
+                          </a:solidFill>
+                          <a:latin typeface="Calibri"/>
+                        </a:rPr>
+                        <a:t>0.77</a:t>
+                      </a:r>
+                    </a:p>
+                  </a:txBody>
+                  <a:tcPr marL="82296" marR="64008" marT="32004" marB="32004" anchor="ctr">
+                    <a:solidFill>
+                      <a:srgbClr val="FFFFFF"/>
+                    </a:solidFill>
+                  </a:tcPr>
+                </a:tc>
+                <a:tc>
+                  <a:txBody>
+                    <a:bodyPr wrap="square"/>
+                    <a:lstStyle/>
+                    <a:p>
+                      <a:r>
+                        <a:rPr sz="1600" b="0">
+                          <a:solidFill>
+                            <a:srgbClr val="14182E"/>
+                          </a:solidFill>
+                          <a:latin typeface="Calibri"/>
+                        </a:rPr>
+                        <a:t>0.36</a:t>
+                      </a:r>
+                    </a:p>
+                  </a:txBody>
+                  <a:tcPr marL="82296" marR="64008" marT="32004" marB="32004" anchor="ctr">
+                    <a:solidFill>
+                      <a:srgbClr val="FFFFFF"/>
+                    </a:solidFill>
+                  </a:tcPr>
+                </a:tc>
+                <a:tc>
+                  <a:txBody>
+                    <a:bodyPr wrap="square"/>
+                    <a:lstStyle/>
+                    <a:p>
+                      <a:r>
+                        <a:rPr sz="1600" b="0">
+                          <a:solidFill>
+                            <a:srgbClr val="14182E"/>
+                          </a:solidFill>
+                          <a:latin typeface="Calibri"/>
+                        </a:rPr>
+                        <a:t>relational, temporal, semantic</a:t>
+                      </a:r>
+                    </a:p>
+                  </a:txBody>
+                  <a:tcPr marL="82296" marR="64008" marT="32004" marB="32004" anchor="ctr">
+                    <a:solidFill>
+                      <a:srgbClr val="FFFFFF"/>
                     </a:solidFill>
                   </a:tcPr>
                 </a:tc>
